--- a/word-drafts/figures/SchemaRegistry-Fig1-Shape.pptx
+++ b/word-drafts/figures/SchemaRegistry-Fig1-Shape.pptx
@@ -3559,7 +3559,7 @@
         <p:spPr>
           <a:xfrm>
             <a:off x="2024062" y="1228725"/>
-            <a:ext cx="619125" cy="123825"/>
+            <a:ext cx="762000" cy="123825"/>
           </a:xfrm>
           <a:prstGeom prst="rect">
             <a:avLst/>
@@ -3631,7 +3631,7 @@
         <p:spPr>
           <a:xfrm>
             <a:off x="3309937" y="1228725"/>
-            <a:ext cx="714375" cy="123825"/>
+            <a:ext cx="895350" cy="123825"/>
           </a:xfrm>
           <a:prstGeom prst="rect">
             <a:avLst/>
@@ -3702,7 +3702,7 @@
         <p:spPr>
           <a:xfrm>
             <a:off x="2024062" y="2314575"/>
-            <a:ext cx="428625" cy="123825"/>
+            <a:ext cx="533400" cy="123825"/>
           </a:xfrm>
           <a:prstGeom prst="rect">
             <a:avLst/>
@@ -3773,7 +3773,7 @@
         <p:spPr>
           <a:xfrm>
             <a:off x="3309937" y="2314575"/>
-            <a:ext cx="428625" cy="123825"/>
+            <a:ext cx="533400" cy="123825"/>
           </a:xfrm>
           <a:prstGeom prst="rect">
             <a:avLst/>
@@ -3844,7 +3844,7 @@
         <p:spPr>
           <a:xfrm>
             <a:off x="2667000" y="3400425"/>
-            <a:ext cx="428625" cy="123825"/>
+            <a:ext cx="533400" cy="123825"/>
           </a:xfrm>
           <a:prstGeom prst="rect">
             <a:avLst/>
@@ -3915,7 +3915,7 @@
         <p:spPr>
           <a:xfrm>
             <a:off x="3952875" y="3400425"/>
-            <a:ext cx="428625" cy="123825"/>
+            <a:ext cx="533400" cy="123825"/>
           </a:xfrm>
           <a:prstGeom prst="rect">
             <a:avLst/>
@@ -3987,7 +3987,7 @@
         <p:spPr>
           <a:xfrm>
             <a:off x="2024062" y="4486275"/>
-            <a:ext cx="466725" cy="123825"/>
+            <a:ext cx="571500" cy="123825"/>
           </a:xfrm>
           <a:prstGeom prst="rect">
             <a:avLst/>
@@ -4059,7 +4059,7 @@
         <p:spPr>
           <a:xfrm>
             <a:off x="2024062" y="4629150"/>
-            <a:ext cx="1428750" cy="123825"/>
+            <a:ext cx="1819275" cy="123825"/>
           </a:xfrm>
           <a:prstGeom prst="rect">
             <a:avLst/>
